--- a/OrangeEnglish_Lesson3_GrammarForDataDescription.pptx
+++ b/OrangeEnglish_Lesson3_GrammarForDataDescription.pptx
@@ -2607,7 +2607,7 @@
                 <a:ea typeface="Inter" pitchFamily="34" charset="-122"/>
                 <a:cs typeface="Inter" pitchFamily="34" charset="-120"/>
               </a:rPr>
-              <a:t>Lesson 3 of 6 · IELTS Writing Task 1 · orangeenglish.nl</a:t>
+              <a:t>Lesson 3 of 8 · IELTS Writing Task 1 · orangeenglish.nl</a:t>
             </a:r>
             <a:endParaRPr lang="en-US" sz="1800" dirty="0"/>
           </a:p>
@@ -3841,7 +3841,7 @@
                 <a:ea typeface="Inter" pitchFamily="34" charset="-122"/>
                 <a:cs typeface="Inter" pitchFamily="34" charset="-120"/>
               </a:rPr>
-              <a:t>Lesson 3 of 6 · IELTS Writing Task 1 · orangeenglish.nl</a:t>
+              <a:t>Lesson 3 of 8 · IELTS Writing Task 1 · orangeenglish.nl</a:t>
             </a:r>
             <a:endParaRPr lang="en-US" sz="1800" dirty="0"/>
           </a:p>
@@ -4554,7 +4554,7 @@
                 <a:ea typeface="Inter" pitchFamily="34" charset="-122"/>
                 <a:cs typeface="Inter" pitchFamily="34" charset="-120"/>
               </a:rPr>
-              <a:t>Lesson 3 of 6 · IELTS Writing Task 1 · orangeenglish.nl</a:t>
+              <a:t>Lesson 3 of 8 · IELTS Writing Task 1 · orangeenglish.nl</a:t>
             </a:r>
             <a:endParaRPr lang="en-US" sz="1800" dirty="0"/>
           </a:p>
@@ -5464,7 +5464,7 @@
                 <a:ea typeface="Inter" pitchFamily="34" charset="-122"/>
                 <a:cs typeface="Inter" pitchFamily="34" charset="-120"/>
               </a:rPr>
-              <a:t>Lesson 3 of 6 · IELTS Writing Task 1 · orangeenglish.nl</a:t>
+              <a:t>Lesson 3 of 8 · IELTS Writing Task 1 · orangeenglish.nl</a:t>
             </a:r>
             <a:endParaRPr lang="en-US" sz="1800" dirty="0"/>
           </a:p>
@@ -6383,7 +6383,7 @@
                 <a:ea typeface="Inter" pitchFamily="34" charset="-122"/>
                 <a:cs typeface="Inter" pitchFamily="34" charset="-120"/>
               </a:rPr>
-              <a:t>Lesson 3 of 6 · IELTS Writing Task 1 · orangeenglish.nl</a:t>
+              <a:t>Lesson 3 of 8 · IELTS Writing Task 1 · orangeenglish.nl</a:t>
             </a:r>
             <a:endParaRPr lang="en-US" sz="1800" dirty="0"/>
           </a:p>
@@ -7240,7 +7240,7 @@
                 <a:ea typeface="Inter" pitchFamily="34" charset="-122"/>
                 <a:cs typeface="Inter" pitchFamily="34" charset="-120"/>
               </a:rPr>
-              <a:t>Lesson 3 of 6 · IELTS Writing Task 1 · orangeenglish.nl</a:t>
+              <a:t>Lesson 3 of 8 · IELTS Writing Task 1 · orangeenglish.nl</a:t>
             </a:r>
             <a:endParaRPr lang="en-US" sz="1800" dirty="0"/>
           </a:p>
@@ -8024,7 +8024,7 @@
                 <a:ea typeface="Inter" pitchFamily="34" charset="-122"/>
                 <a:cs typeface="Inter" pitchFamily="34" charset="-120"/>
               </a:rPr>
-              <a:t>Lesson 3 of 6 · IELTS Writing Task 1 · orangeenglish.nl</a:t>
+              <a:t>Lesson 3 of 8 · IELTS Writing Task 1 · orangeenglish.nl</a:t>
             </a:r>
             <a:endParaRPr lang="en-US" sz="1800" dirty="0"/>
           </a:p>
@@ -8842,7 +8842,7 @@
                 <a:ea typeface="Inter" pitchFamily="34" charset="-122"/>
                 <a:cs typeface="Inter" pitchFamily="34" charset="-120"/>
               </a:rPr>
-              <a:t>Lesson 3 of 6 · IELTS Writing Task 1 · orangeenglish.nl</a:t>
+              <a:t>Lesson 3 of 8 · IELTS Writing Task 1 · orangeenglish.nl</a:t>
             </a:r>
             <a:endParaRPr lang="en-US" sz="1800" dirty="0"/>
           </a:p>

--- a/OrangeEnglish_Lesson3_GrammarForDataDescription.pptx
+++ b/OrangeEnglish_Lesson3_GrammarForDataDescription.pptx
@@ -1599,6 +1599,10 @@
           </a:solidFill>
           <a:ln/>
         </p:spPr>
+        <p:txBody>
+          <a:bodyPr/>
+          <a:p/>
+        </p:txBody>
       </p:sp>
       <p:pic>
         <p:nvPicPr>
@@ -1968,6 +1972,10 @@
           </a:solidFill>
           <a:ln/>
         </p:spPr>
+        <p:txBody>
+          <a:bodyPr/>
+          <a:p/>
+        </p:txBody>
       </p:sp>
       <p:pic>
         <p:nvPicPr>
@@ -2095,7 +2103,7 @@
                 <a:ea typeface="Montserrat" pitchFamily="34" charset="-122"/>
                 <a:cs typeface="Montserrat" pitchFamily="34" charset="-120"/>
               </a:rPr>
-              <a:t>Grammar is its own band score, and an easy one to win.</a:t>
+              <a:t>Grammar is a quarter of your Task 1 score.</a:t>
             </a:r>
             <a:endParaRPr lang="en-US" sz="4050" dirty="0"/>
           </a:p>
@@ -2607,7 +2615,7 @@
                 <a:ea typeface="Inter" pitchFamily="34" charset="-122"/>
                 <a:cs typeface="Inter" pitchFamily="34" charset="-120"/>
               </a:rPr>
-              <a:t>Lesson 3 of 8 · IELTS Writing Task 1 · orangeenglish.nl</a:t>
+              <a:t>Lesson 3 of 6 · IELTS Writing Task 1 · orangeenglish.nl</a:t>
             </a:r>
             <a:endParaRPr lang="en-US" sz="1800" dirty="0"/>
           </a:p>
@@ -2698,6 +2706,10 @@
           </a:solidFill>
           <a:ln/>
         </p:spPr>
+        <p:txBody>
+          <a:bodyPr/>
+          <a:p/>
+        </p:txBody>
       </p:sp>
       <p:pic>
         <p:nvPicPr>
@@ -2983,7 +2995,7 @@
                 <a:ea typeface="Inter" pitchFamily="34" charset="-122"/>
                 <a:cs typeface="Inter" pitchFamily="34" charset="-120"/>
               </a:rPr>
-              <a:t>If the graph shows data recorded up to a fixed point, even last year, describe it in the past simple. Only switch tense if the graph shows a </a:t>
+              <a:t>If the graph shows data recorded up to a fixed point, even last year, describe it in the past simple. Choose the tense from the time reference: use future forms for a </a:t>
             </a:r>
             <a:pPr algn="l" indent="0" marL="0">
               <a:lnSpc>
@@ -3053,6 +3065,10 @@
             <a:prstDash val="solid"/>
           </a:ln>
         </p:spPr>
+        <p:txBody>
+          <a:bodyPr/>
+          <a:p/>
+        </p:txBody>
       </p:sp>
       <p:sp>
         <p:nvSpPr>
@@ -3206,6 +3222,10 @@
             <a:prstDash val="solid"/>
           </a:ln>
         </p:spPr>
+        <p:txBody>
+          <a:bodyPr/>
+          <a:p/>
+        </p:txBody>
       </p:sp>
       <p:sp>
         <p:nvSpPr>
@@ -3269,6 +3289,10 @@
           </a:solidFill>
           <a:ln/>
         </p:spPr>
+        <p:txBody>
+          <a:bodyPr/>
+          <a:p/>
+        </p:txBody>
       </p:sp>
       <p:sp>
         <p:nvSpPr>
@@ -3414,6 +3438,10 @@
           </a:solidFill>
           <a:ln/>
         </p:spPr>
+        <p:txBody>
+          <a:bodyPr/>
+          <a:p/>
+        </p:txBody>
       </p:sp>
       <p:sp>
         <p:nvSpPr>
@@ -3559,6 +3587,10 @@
           </a:solidFill>
           <a:ln/>
         </p:spPr>
+        <p:txBody>
+          <a:bodyPr/>
+          <a:p/>
+        </p:txBody>
       </p:sp>
       <p:sp>
         <p:nvSpPr>
@@ -3841,7 +3873,7 @@
                 <a:ea typeface="Inter" pitchFamily="34" charset="-122"/>
                 <a:cs typeface="Inter" pitchFamily="34" charset="-120"/>
               </a:rPr>
-              <a:t>Lesson 3 of 8 · IELTS Writing Task 1 · orangeenglish.nl</a:t>
+              <a:t>Lesson 3 of 6 · IELTS Writing Task 1 · orangeenglish.nl</a:t>
             </a:r>
             <a:endParaRPr lang="en-US" sz="1800" dirty="0"/>
           </a:p>
@@ -3932,6 +3964,10 @@
           </a:solidFill>
           <a:ln/>
         </p:spPr>
+        <p:txBody>
+          <a:bodyPr/>
+          <a:p/>
+        </p:txBody>
       </p:sp>
       <p:pic>
         <p:nvPicPr>
@@ -4095,6 +4131,10 @@
             <a:prstDash val="solid"/>
           </a:ln>
         </p:spPr>
+        <p:txBody>
+          <a:bodyPr/>
+          <a:p/>
+        </p:txBody>
       </p:sp>
       <p:pic>
         <p:nvPicPr>
@@ -4322,6 +4362,10 @@
             <a:prstDash val="solid"/>
           </a:ln>
         </p:spPr>
+        <p:txBody>
+          <a:bodyPr/>
+          <a:p/>
+        </p:txBody>
       </p:sp>
       <p:pic>
         <p:nvPicPr>
@@ -4554,7 +4598,7 @@
                 <a:ea typeface="Inter" pitchFamily="34" charset="-122"/>
                 <a:cs typeface="Inter" pitchFamily="34" charset="-120"/>
               </a:rPr>
-              <a:t>Lesson 3 of 8 · IELTS Writing Task 1 · orangeenglish.nl</a:t>
+              <a:t>Lesson 3 of 6 · IELTS Writing Task 1 · orangeenglish.nl</a:t>
             </a:r>
             <a:endParaRPr lang="en-US" sz="1800" dirty="0"/>
           </a:p>
@@ -4645,6 +4689,10 @@
           </a:solidFill>
           <a:ln/>
         </p:spPr>
+        <p:txBody>
+          <a:bodyPr/>
+          <a:p/>
+        </p:txBody>
       </p:sp>
       <p:pic>
         <p:nvPicPr>
@@ -4808,6 +4856,10 @@
             <a:prstDash val="solid"/>
           </a:ln>
         </p:spPr>
+        <p:txBody>
+          <a:bodyPr/>
+          <a:p/>
+        </p:txBody>
       </p:sp>
       <p:pic>
         <p:nvPicPr>
@@ -5025,6 +5077,10 @@
             <a:prstDash val="solid"/>
           </a:ln>
         </p:spPr>
+        <p:txBody>
+          <a:bodyPr/>
+          <a:p/>
+        </p:txBody>
       </p:sp>
       <p:pic>
         <p:nvPicPr>
@@ -5242,6 +5298,10 @@
             <a:prstDash val="solid"/>
           </a:ln>
         </p:spPr>
+        <p:txBody>
+          <a:bodyPr/>
+          <a:p/>
+        </p:txBody>
       </p:sp>
       <p:pic>
         <p:nvPicPr>
@@ -5464,7 +5524,7 @@
                 <a:ea typeface="Inter" pitchFamily="34" charset="-122"/>
                 <a:cs typeface="Inter" pitchFamily="34" charset="-120"/>
               </a:rPr>
-              <a:t>Lesson 3 of 8 · IELTS Writing Task 1 · orangeenglish.nl</a:t>
+              <a:t>Lesson 3 of 6 · IELTS Writing Task 1 · orangeenglish.nl</a:t>
             </a:r>
             <a:endParaRPr lang="en-US" sz="1800" dirty="0"/>
           </a:p>
@@ -5555,6 +5615,10 @@
           </a:solidFill>
           <a:ln/>
         </p:spPr>
+        <p:txBody>
+          <a:bodyPr/>
+          <a:p/>
+        </p:txBody>
       </p:sp>
       <p:pic>
         <p:nvPicPr>
@@ -5718,6 +5782,10 @@
             <a:prstDash val="solid"/>
           </a:ln>
         </p:spPr>
+        <p:txBody>
+          <a:bodyPr/>
+          <a:p/>
+        </p:txBody>
       </p:sp>
       <p:sp>
         <p:nvSpPr>
@@ -5938,6 +6006,10 @@
             <a:prstDash val="solid"/>
           </a:ln>
         </p:spPr>
+        <p:txBody>
+          <a:bodyPr/>
+          <a:p/>
+        </p:txBody>
       </p:sp>
       <p:sp>
         <p:nvSpPr>
@@ -6158,6 +6230,10 @@
             <a:prstDash val="solid"/>
           </a:ln>
         </p:spPr>
+        <p:txBody>
+          <a:bodyPr/>
+          <a:p/>
+        </p:txBody>
       </p:sp>
       <p:sp>
         <p:nvSpPr>
@@ -6383,7 +6459,7 @@
                 <a:ea typeface="Inter" pitchFamily="34" charset="-122"/>
                 <a:cs typeface="Inter" pitchFamily="34" charset="-120"/>
               </a:rPr>
-              <a:t>Lesson 3 of 8 · IELTS Writing Task 1 · orangeenglish.nl</a:t>
+              <a:t>Lesson 3 of 6 · IELTS Writing Task 1 · orangeenglish.nl</a:t>
             </a:r>
             <a:endParaRPr lang="en-US" sz="1800" dirty="0"/>
           </a:p>
@@ -6474,6 +6550,10 @@
           </a:solidFill>
           <a:ln/>
         </p:spPr>
+        <p:txBody>
+          <a:bodyPr/>
+          <a:p/>
+        </p:txBody>
       </p:sp>
       <p:pic>
         <p:nvPicPr>
@@ -6637,6 +6717,10 @@
             <a:prstDash val="solid"/>
           </a:ln>
         </p:spPr>
+        <p:txBody>
+          <a:bodyPr/>
+          <a:p/>
+        </p:txBody>
       </p:sp>
       <p:sp>
         <p:nvSpPr>
@@ -6835,6 +6919,10 @@
             <a:prstDash val="solid"/>
           </a:ln>
         </p:spPr>
+        <p:txBody>
+          <a:bodyPr/>
+          <a:p/>
+        </p:txBody>
       </p:sp>
       <p:sp>
         <p:nvSpPr>
@@ -7240,7 +7328,7 @@
                 <a:ea typeface="Inter" pitchFamily="34" charset="-122"/>
                 <a:cs typeface="Inter" pitchFamily="34" charset="-120"/>
               </a:rPr>
-              <a:t>Lesson 3 of 8 · IELTS Writing Task 1 · orangeenglish.nl</a:t>
+              <a:t>Lesson 3 of 6 · IELTS Writing Task 1 · orangeenglish.nl</a:t>
             </a:r>
             <a:endParaRPr lang="en-US" sz="1800" dirty="0"/>
           </a:p>
@@ -7331,6 +7419,10 @@
           </a:solidFill>
           <a:ln/>
         </p:spPr>
+        <p:txBody>
+          <a:bodyPr/>
+          <a:p/>
+        </p:txBody>
       </p:sp>
       <p:pic>
         <p:nvPicPr>
@@ -7658,6 +7750,10 @@
           </a:solidFill>
           <a:ln/>
         </p:spPr>
+        <p:txBody>
+          <a:bodyPr/>
+          <a:p/>
+        </p:txBody>
       </p:sp>
       <p:sp>
         <p:nvSpPr>
@@ -7768,6 +7864,10 @@
           </a:solidFill>
           <a:ln/>
         </p:spPr>
+        <p:txBody>
+          <a:bodyPr/>
+          <a:p/>
+        </p:txBody>
       </p:sp>
       <p:sp>
         <p:nvSpPr>
@@ -7878,6 +7978,10 @@
           </a:solidFill>
           <a:ln/>
         </p:spPr>
+        <p:txBody>
+          <a:bodyPr/>
+          <a:p/>
+        </p:txBody>
       </p:sp>
       <p:sp>
         <p:nvSpPr>
@@ -7988,6 +8092,10 @@
           </a:solidFill>
           <a:ln/>
         </p:spPr>
+        <p:txBody>
+          <a:bodyPr/>
+          <a:p/>
+        </p:txBody>
       </p:sp>
       <p:sp>
         <p:nvSpPr>
@@ -8024,7 +8132,7 @@
                 <a:ea typeface="Inter" pitchFamily="34" charset="-122"/>
                 <a:cs typeface="Inter" pitchFamily="34" charset="-120"/>
               </a:rPr>
-              <a:t>Lesson 3 of 8 · IELTS Writing Task 1 · orangeenglish.nl</a:t>
+              <a:t>Lesson 3 of 6 · IELTS Writing Task 1 · orangeenglish.nl</a:t>
             </a:r>
             <a:endParaRPr lang="en-US" sz="1800" dirty="0"/>
           </a:p>
@@ -8115,6 +8223,10 @@
           </a:solidFill>
           <a:ln/>
         </p:spPr>
+        <p:txBody>
+          <a:bodyPr/>
+          <a:p/>
+        </p:txBody>
       </p:sp>
       <p:pic>
         <p:nvPicPr>
@@ -8267,6 +8379,10 @@
           </a:solidFill>
           <a:ln/>
         </p:spPr>
+        <p:txBody>
+          <a:bodyPr/>
+          <a:p/>
+        </p:txBody>
       </p:sp>
       <p:sp>
         <p:nvSpPr>
@@ -8306,7 +8422,7 @@
                 <a:ea typeface="Inter" pitchFamily="34" charset="-122"/>
                 <a:cs typeface="Inter" pitchFamily="34" charset="-120"/>
               </a:rPr>
-              <a:t>Default to the </a:t>
+              <a:t>Use the </a:t>
             </a:r>
             <a:pPr algn="l" indent="0" marL="0">
               <a:lnSpc>
@@ -8340,7 +8456,7 @@
                 <a:ea typeface="Inter" pitchFamily="34" charset="-122"/>
                 <a:cs typeface="Inter" pitchFamily="34" charset="-120"/>
               </a:rPr>
-              <a:t>for completed, historical data, switch tense only for projections.</a:t>
+              <a:t>for completed, historical data, and choose other forms by the time reference, such as future forms for projections.</a:t>
             </a:r>
             <a:endParaRPr lang="en-US" sz="2400" dirty="0"/>
           </a:p>
@@ -8365,6 +8481,10 @@
           </a:solidFill>
           <a:ln/>
         </p:spPr>
+        <p:txBody>
+          <a:bodyPr/>
+          <a:p/>
+        </p:txBody>
       </p:sp>
       <p:sp>
         <p:nvSpPr>
@@ -8497,6 +8617,10 @@
           </a:solidFill>
           <a:ln/>
         </p:spPr>
+        <p:txBody>
+          <a:bodyPr/>
+          <a:p/>
+        </p:txBody>
       </p:sp>
       <p:sp>
         <p:nvSpPr>
@@ -8646,6 +8770,10 @@
           </a:solidFill>
           <a:ln/>
         </p:spPr>
+        <p:txBody>
+          <a:bodyPr/>
+          <a:p/>
+        </p:txBody>
       </p:sp>
       <p:sp>
         <p:nvSpPr>
@@ -8842,7 +8970,7 @@
                 <a:ea typeface="Inter" pitchFamily="34" charset="-122"/>
                 <a:cs typeface="Inter" pitchFamily="34" charset="-120"/>
               </a:rPr>
-              <a:t>Lesson 3 of 8 · IELTS Writing Task 1 · orangeenglish.nl</a:t>
+              <a:t>Lesson 3 of 6 · IELTS Writing Task 1 · orangeenglish.nl</a:t>
             </a:r>
             <a:endParaRPr lang="en-US" sz="1800" dirty="0"/>
           </a:p>
